--- a/Week03/MoreHtmlElements.pptx
+++ b/Week03/MoreHtmlElements.pptx
@@ -7014,7 +7014,7 @@
           <a:p>
             <a:fld id="{5958763E-B898-436D-883D-03711491D54A}" type="datetimeFigureOut">
               <a:rPr lang="en-US" smtClean="0"/>
-              <a:t>1/30/2026</a:t>
+              <a:t>8/27/2026</a:t>
             </a:fld>
             <a:endParaRPr lang="en-US"/>
           </a:p>
@@ -7215,7 +7215,7 @@
           <a:p>
             <a:fld id="{5958763E-B898-436D-883D-03711491D54A}" type="datetimeFigureOut">
               <a:rPr lang="en-US" smtClean="0"/>
-              <a:t>1/30/2026</a:t>
+              <a:t>8/27/2026</a:t>
             </a:fld>
             <a:endParaRPr lang="en-US"/>
           </a:p>
@@ -10519,20 +10519,20 @@
                 <a:solidFill>
                   <a:schemeClr val="bg1"/>
                 </a:solidFill>
-                <a:highlight>
-                  <a:srgbClr val="C0C0C0"/>
-                </a:highlight>
-                <a:hlinkClick r:id="rId3"/>
-              </a:rPr>
-              <a:t>https://jsfiddle.net/70jat2m6/</a:t>
+                <a:hlinkClick r:id="rId3">
+                  <a:extLst>
+                    <a:ext uri="{A12FA001-AC4F-418D-AE19-62706E023703}">
+                      <ahyp:hlinkClr xmlns:ahyp="http://schemas.microsoft.com/office/drawing/2018/hyperlinkcolor" val="tx"/>
+                    </a:ext>
+                  </a:extLst>
+                </a:hlinkClick>
+              </a:rPr>
+              <a:t>https://hytop.onrender.com/e/html-table-example</a:t>
             </a:r>
             <a:endParaRPr lang="en-US" sz="2400" b="1" dirty="0">
               <a:solidFill>
                 <a:schemeClr val="bg1"/>
               </a:solidFill>
-              <a:highlight>
-                <a:srgbClr val="C0C0C0"/>
-              </a:highlight>
             </a:endParaRPr>
           </a:p>
         </p:txBody>
@@ -11354,20 +11354,20 @@
                 <a:solidFill>
                   <a:schemeClr val="bg1"/>
                 </a:solidFill>
-                <a:highlight>
-                  <a:srgbClr val="C0C0C0"/>
-                </a:highlight>
-                <a:hlinkClick r:id="rId3"/>
-              </a:rPr>
-              <a:t>https://jsfiddle.net/atg9vohw/</a:t>
+                <a:hlinkClick r:id="rId3">
+                  <a:extLst>
+                    <a:ext uri="{A12FA001-AC4F-418D-AE19-62706E023703}">
+                      <ahyp:hlinkClr xmlns:ahyp="http://schemas.microsoft.com/office/drawing/2018/hyperlinkcolor" val="tx"/>
+                    </a:ext>
+                  </a:extLst>
+                </a:hlinkClick>
+              </a:rPr>
+              <a:t>https://hytop.onrender.com/e/html-iframe-example</a:t>
             </a:r>
             <a:endParaRPr lang="en-US" sz="2400" b="1" dirty="0">
               <a:solidFill>
                 <a:schemeClr val="bg1"/>
               </a:solidFill>
-              <a:highlight>
-                <a:srgbClr val="C0C0C0"/>
-              </a:highlight>
             </a:endParaRPr>
           </a:p>
         </p:txBody>
@@ -13819,7 +13819,7 @@
                   </a:extLst>
                 </a:hlinkClick>
               </a:rPr>
-              <a:t>https://jsfiddle.net/5fmw3dL8/</a:t>
+              <a:t>https://hytop.onrender.com/e/html-list-example</a:t>
             </a:r>
             <a:endParaRPr lang="en-US" sz="2400" b="1" dirty="0">
               <a:solidFill>
@@ -16703,7 +16703,7 @@
                   </a:extLst>
                 </a:hlinkClick>
               </a:rPr>
-              <a:t>https://jsfiddle.net/mz7gpx6c/</a:t>
+              <a:t>https://hytop.onrender.com/e/html-input-example</a:t>
             </a:r>
             <a:endParaRPr lang="en-US" sz="2400" b="1" dirty="0">
               <a:solidFill>
